--- a/Big Mountain Resort Executive Presentation.pptx
+++ b/Big Mountain Resort Executive Presentation.pptx
@@ -298,6 +298,13 @@
               <a:schemeClr val="lt1"/>
             </a:fontRef>
           </p:style>
+          <p:txBody>
+            <a:bodyPr/>
+            <a:lstStyle/>
+            <a:p>
+              <a:endParaRPr lang="en-US"/>
+            </a:p>
+          </p:txBody>
         </p:sp>
         <p:sp>
           <p:nvSpPr>
@@ -361,6 +368,13 @@
               <a:schemeClr val="lt1"/>
             </a:fontRef>
           </p:style>
+          <p:txBody>
+            <a:bodyPr/>
+            <a:lstStyle/>
+            <a:p>
+              <a:endParaRPr lang="en-US"/>
+            </a:p>
+          </p:txBody>
         </p:sp>
         <p:sp>
           <p:nvSpPr>
@@ -402,6 +416,13 @@
               <a:schemeClr val="lt1"/>
             </a:fontRef>
           </p:style>
+          <p:txBody>
+            <a:bodyPr/>
+            <a:lstStyle/>
+            <a:p>
+              <a:endParaRPr lang="en-US"/>
+            </a:p>
+          </p:txBody>
         </p:sp>
         <p:sp>
           <p:nvSpPr>
@@ -466,6 +487,13 @@
               <a:schemeClr val="lt1"/>
             </a:fontRef>
           </p:style>
+          <p:txBody>
+            <a:bodyPr/>
+            <a:lstStyle/>
+            <a:p>
+              <a:endParaRPr lang="en-US"/>
+            </a:p>
+          </p:txBody>
         </p:sp>
         <p:sp>
           <p:nvSpPr>
@@ -531,6 +559,13 @@
               <a:schemeClr val="lt1"/>
             </a:fontRef>
           </p:style>
+          <p:txBody>
+            <a:bodyPr/>
+            <a:lstStyle/>
+            <a:p>
+              <a:endParaRPr lang="en-US"/>
+            </a:p>
+          </p:txBody>
         </p:sp>
         <p:sp>
           <p:nvSpPr>
@@ -594,6 +629,13 @@
               <a:schemeClr val="lt1"/>
             </a:fontRef>
           </p:style>
+          <p:txBody>
+            <a:bodyPr/>
+            <a:lstStyle/>
+            <a:p>
+              <a:endParaRPr lang="en-US"/>
+            </a:p>
+          </p:txBody>
         </p:sp>
         <p:sp>
           <p:nvSpPr>
@@ -635,6 +677,13 @@
               <a:schemeClr val="lt1"/>
             </a:fontRef>
           </p:style>
+          <p:txBody>
+            <a:bodyPr/>
+            <a:lstStyle/>
+            <a:p>
+              <a:endParaRPr lang="en-US"/>
+            </a:p>
+          </p:txBody>
         </p:sp>
         <p:sp>
           <p:nvSpPr>
@@ -676,6 +725,13 @@
               <a:schemeClr val="lt1"/>
             </a:fontRef>
           </p:style>
+          <p:txBody>
+            <a:bodyPr/>
+            <a:lstStyle/>
+            <a:p>
+              <a:endParaRPr lang="en-US"/>
+            </a:p>
+          </p:txBody>
         </p:sp>
       </p:grpSp>
       <p:sp>
@@ -4814,6 +4870,13 @@
               <a:schemeClr val="lt1"/>
             </a:fontRef>
           </p:style>
+          <p:txBody>
+            <a:bodyPr/>
+            <a:lstStyle/>
+            <a:p>
+              <a:endParaRPr lang="en-US"/>
+            </a:p>
+          </p:txBody>
         </p:sp>
         <p:sp>
           <p:nvSpPr>
@@ -4877,6 +4940,13 @@
               <a:schemeClr val="lt1"/>
             </a:fontRef>
           </p:style>
+          <p:txBody>
+            <a:bodyPr/>
+            <a:lstStyle/>
+            <a:p>
+              <a:endParaRPr lang="en-US"/>
+            </a:p>
+          </p:txBody>
         </p:sp>
         <p:sp>
           <p:nvSpPr>
@@ -4918,6 +4988,13 @@
               <a:schemeClr val="lt1"/>
             </a:fontRef>
           </p:style>
+          <p:txBody>
+            <a:bodyPr/>
+            <a:lstStyle/>
+            <a:p>
+              <a:endParaRPr lang="en-US"/>
+            </a:p>
+          </p:txBody>
         </p:sp>
         <p:sp>
           <p:nvSpPr>
@@ -4982,6 +5059,13 @@
               <a:schemeClr val="lt1"/>
             </a:fontRef>
           </p:style>
+          <p:txBody>
+            <a:bodyPr/>
+            <a:lstStyle/>
+            <a:p>
+              <a:endParaRPr lang="en-US"/>
+            </a:p>
+          </p:txBody>
         </p:sp>
         <p:sp>
           <p:nvSpPr>
@@ -5047,6 +5131,13 @@
               <a:schemeClr val="lt1"/>
             </a:fontRef>
           </p:style>
+          <p:txBody>
+            <a:bodyPr/>
+            <a:lstStyle/>
+            <a:p>
+              <a:endParaRPr lang="en-US"/>
+            </a:p>
+          </p:txBody>
         </p:sp>
         <p:sp>
           <p:nvSpPr>
@@ -5110,6 +5201,13 @@
               <a:schemeClr val="lt1"/>
             </a:fontRef>
           </p:style>
+          <p:txBody>
+            <a:bodyPr/>
+            <a:lstStyle/>
+            <a:p>
+              <a:endParaRPr lang="en-US"/>
+            </a:p>
+          </p:txBody>
         </p:sp>
         <p:sp>
           <p:nvSpPr>
@@ -5151,6 +5249,13 @@
               <a:schemeClr val="lt1"/>
             </a:fontRef>
           </p:style>
+          <p:txBody>
+            <a:bodyPr/>
+            <a:lstStyle/>
+            <a:p>
+              <a:endParaRPr lang="en-US"/>
+            </a:p>
+          </p:txBody>
         </p:sp>
         <p:sp>
           <p:nvSpPr>
@@ -5192,6 +5297,13 @@
               <a:schemeClr val="lt1"/>
             </a:fontRef>
           </p:style>
+          <p:txBody>
+            <a:bodyPr/>
+            <a:lstStyle/>
+            <a:p>
+              <a:endParaRPr lang="en-US"/>
+            </a:p>
+          </p:txBody>
         </p:sp>
       </p:grpSp>
       <p:sp>
@@ -9947,15 +10059,15 @@
               </a:ext>
             </a:extLst>
           </a:blip>
-          <a:srcRect l="1302" r="21589" b="-2"/>
+          <a:srcRect l="1302" r="38602" b="-2"/>
           <a:stretch>
             <a:fillRect/>
           </a:stretch>
         </p:blipFill>
         <p:spPr bwMode="auto">
           <a:xfrm>
-            <a:off x="4269854" y="-1"/>
-            <a:ext cx="7922146" cy="6858001"/>
+            <a:off x="5340399" y="-1"/>
+            <a:ext cx="6174268" cy="6858001"/>
           </a:xfrm>
           <a:custGeom>
             <a:avLst/>
@@ -10043,7 +10155,7 @@
         <p:spPr>
           <a:xfrm>
             <a:off x="677333" y="479913"/>
-            <a:ext cx="3851123" cy="1320800"/>
+            <a:ext cx="4565227" cy="1320800"/>
           </a:xfrm>
         </p:spPr>
         <p:txBody>
@@ -10075,8 +10187,8 @@
         </p:nvSpPr>
         <p:spPr>
           <a:xfrm>
-            <a:off x="37506" y="2293461"/>
-            <a:ext cx="5966263" cy="3880773"/>
+            <a:off x="123538" y="2485108"/>
+            <a:ext cx="6287422" cy="3880773"/>
           </a:xfrm>
         </p:spPr>
         <p:txBody>
@@ -10087,7 +10199,7 @@
           <a:p>
             <a:r>
               <a:rPr lang="en-US" dirty="0"/>
-              <a:t>Primary recommendation to increase lift ticket prices to at least $94 per person</a:t>
+              <a:t>Primary recommendation to increase lift ticket prices  to at least $94 per person</a:t>
             </a:r>
           </a:p>
           <a:p>
